--- a/public/videos/repositories/dart-portal/dart-portal-tech-preview.pptx
+++ b/public/videos/repositories/dart-portal/dart-portal-tech-preview.pptx
@@ -134,7 +134,7 @@
           <p:cNvPr id="2" name="タイトル 1">
             <a:extLst>
               <a:ext uri="{FF2B5EF4-FFF2-40B4-BE49-F238E27FC236}">
-                <a16:creationId xmlns:a16="http://schemas.microsoft.com/office/drawing/2014/main" id="{D41E4B82-FCEE-1201-B223-650587EE4EA7}"/>
+                <a16:creationId xmlns:a16="http://schemas.microsoft.com/office/drawing/2014/main" id="{AB98AED0-86F9-C893-F185-2C909CB1587E}"/>
               </a:ext>
             </a:extLst>
           </p:cNvPr>
@@ -171,7 +171,7 @@
           <p:cNvPr id="3" name="字幕 2">
             <a:extLst>
               <a:ext uri="{FF2B5EF4-FFF2-40B4-BE49-F238E27FC236}">
-                <a16:creationId xmlns:a16="http://schemas.microsoft.com/office/drawing/2014/main" id="{74B6CCC3-E986-DB9E-919E-B281669A4F69}"/>
+                <a16:creationId xmlns:a16="http://schemas.microsoft.com/office/drawing/2014/main" id="{824CE1E2-14E1-2521-A4C4-5D20E56A8F87}"/>
               </a:ext>
             </a:extLst>
           </p:cNvPr>
@@ -241,7 +241,7 @@
           <p:cNvPr id="4" name="日付プレースホルダー 3">
             <a:extLst>
               <a:ext uri="{FF2B5EF4-FFF2-40B4-BE49-F238E27FC236}">
-                <a16:creationId xmlns:a16="http://schemas.microsoft.com/office/drawing/2014/main" id="{BB46C9BC-FD5D-80AA-4267-B6E11AE1643F}"/>
+                <a16:creationId xmlns:a16="http://schemas.microsoft.com/office/drawing/2014/main" id="{7A9171DD-47AF-7AD9-6819-6C4F49E9DD71}"/>
               </a:ext>
             </a:extLst>
           </p:cNvPr>
@@ -257,7 +257,7 @@
           <a:bodyPr/>
           <a:lstStyle/>
           <a:p>
-            <a:fld id="{4F006E82-A5AF-4F83-A870-9792E322D5C0}" type="datetimeFigureOut">
+            <a:fld id="{0677DD58-899E-4880-BE38-D698A82DE6D0}" type="datetimeFigureOut">
               <a:rPr kumimoji="1" lang="ja-JP" altLang="en-US" smtClean="0"/>
               <a:t>2026/7/30</a:t>
             </a:fld>
@@ -270,7 +270,7 @@
           <p:cNvPr id="5" name="フッター プレースホルダー 4">
             <a:extLst>
               <a:ext uri="{FF2B5EF4-FFF2-40B4-BE49-F238E27FC236}">
-                <a16:creationId xmlns:a16="http://schemas.microsoft.com/office/drawing/2014/main" id="{51A11CB3-4A22-1399-0AA9-FE5C1912B19C}"/>
+                <a16:creationId xmlns:a16="http://schemas.microsoft.com/office/drawing/2014/main" id="{8CADA340-B6A1-3FEF-84BD-8ADFDDD9F72E}"/>
               </a:ext>
             </a:extLst>
           </p:cNvPr>
@@ -295,7 +295,7 @@
           <p:cNvPr id="6" name="スライド番号プレースホルダー 5">
             <a:extLst>
               <a:ext uri="{FF2B5EF4-FFF2-40B4-BE49-F238E27FC236}">
-                <a16:creationId xmlns:a16="http://schemas.microsoft.com/office/drawing/2014/main" id="{F81CEA79-EE20-2EC7-F34B-9F90B9BED26A}"/>
+                <a16:creationId xmlns:a16="http://schemas.microsoft.com/office/drawing/2014/main" id="{EAB49FD7-D80C-0A21-158E-F95E0F63B70B}"/>
               </a:ext>
             </a:extLst>
           </p:cNvPr>
@@ -311,7 +311,7 @@
           <a:bodyPr/>
           <a:lstStyle/>
           <a:p>
-            <a:fld id="{10F5DA9A-F8F8-4C09-9300-0EC11599EF1C}" type="slidenum">
+            <a:fld id="{B68EBE78-F976-4D8A-91AA-80465F9E6AE4}" type="slidenum">
               <a:rPr kumimoji="1" lang="ja-JP" altLang="en-US" smtClean="0"/>
               <a:t>‹#›</a:t>
             </a:fld>
@@ -322,7 +322,7 @@
     </p:spTree>
     <p:extLst>
       <p:ext uri="{BB962C8B-B14F-4D97-AF65-F5344CB8AC3E}">
-        <p14:creationId xmlns:p14="http://schemas.microsoft.com/office/powerpoint/2010/main" val="2416692245"/>
+        <p14:creationId xmlns:p14="http://schemas.microsoft.com/office/powerpoint/2010/main" val="1530993451"/>
       </p:ext>
     </p:extLst>
   </p:cSld>
@@ -354,7 +354,7 @@
           <p:cNvPr id="2" name="タイトル 1">
             <a:extLst>
               <a:ext uri="{FF2B5EF4-FFF2-40B4-BE49-F238E27FC236}">
-                <a16:creationId xmlns:a16="http://schemas.microsoft.com/office/drawing/2014/main" id="{69E1C3D5-1FC4-1120-43A6-63B5C76DD246}"/>
+                <a16:creationId xmlns:a16="http://schemas.microsoft.com/office/drawing/2014/main" id="{2810A701-A93C-72C0-BB5B-E2FA977D2AA2}"/>
               </a:ext>
             </a:extLst>
           </p:cNvPr>
@@ -382,7 +382,7 @@
           <p:cNvPr id="3" name="縦書きテキスト プレースホルダー 2">
             <a:extLst>
               <a:ext uri="{FF2B5EF4-FFF2-40B4-BE49-F238E27FC236}">
-                <a16:creationId xmlns:a16="http://schemas.microsoft.com/office/drawing/2014/main" id="{905D5057-53CB-2CDB-AFE8-6B77F028B491}"/>
+                <a16:creationId xmlns:a16="http://schemas.microsoft.com/office/drawing/2014/main" id="{8995D153-9D52-4B2F-95C4-94A2B65A9AF6}"/>
               </a:ext>
             </a:extLst>
           </p:cNvPr>
@@ -471,7 +471,7 @@
           <p:cNvPr id="4" name="日付プレースホルダー 3">
             <a:extLst>
               <a:ext uri="{FF2B5EF4-FFF2-40B4-BE49-F238E27FC236}">
-                <a16:creationId xmlns:a16="http://schemas.microsoft.com/office/drawing/2014/main" id="{7ECE4179-8972-E3B5-32F1-E57186DD4153}"/>
+                <a16:creationId xmlns:a16="http://schemas.microsoft.com/office/drawing/2014/main" id="{74EB3DBF-EC51-E49C-4A57-76F3439C43DD}"/>
               </a:ext>
             </a:extLst>
           </p:cNvPr>
@@ -487,7 +487,7 @@
           <a:bodyPr/>
           <a:lstStyle/>
           <a:p>
-            <a:fld id="{4F006E82-A5AF-4F83-A870-9792E322D5C0}" type="datetimeFigureOut">
+            <a:fld id="{0677DD58-899E-4880-BE38-D698A82DE6D0}" type="datetimeFigureOut">
               <a:rPr kumimoji="1" lang="ja-JP" altLang="en-US" smtClean="0"/>
               <a:t>2026/7/30</a:t>
             </a:fld>
@@ -500,7 +500,7 @@
           <p:cNvPr id="5" name="フッター プレースホルダー 4">
             <a:extLst>
               <a:ext uri="{FF2B5EF4-FFF2-40B4-BE49-F238E27FC236}">
-                <a16:creationId xmlns:a16="http://schemas.microsoft.com/office/drawing/2014/main" id="{B6B2D268-9BC5-9118-A06D-E3A24DFEA71A}"/>
+                <a16:creationId xmlns:a16="http://schemas.microsoft.com/office/drawing/2014/main" id="{5AEC0157-FF53-E905-079B-0DF819CA1263}"/>
               </a:ext>
             </a:extLst>
           </p:cNvPr>
@@ -525,7 +525,7 @@
           <p:cNvPr id="6" name="スライド番号プレースホルダー 5">
             <a:extLst>
               <a:ext uri="{FF2B5EF4-FFF2-40B4-BE49-F238E27FC236}">
-                <a16:creationId xmlns:a16="http://schemas.microsoft.com/office/drawing/2014/main" id="{6A95B4B1-98F9-162E-113D-E5941AA7AE2A}"/>
+                <a16:creationId xmlns:a16="http://schemas.microsoft.com/office/drawing/2014/main" id="{0669622D-16FC-BF1F-E192-D83417B7EDDE}"/>
               </a:ext>
             </a:extLst>
           </p:cNvPr>
@@ -541,7 +541,7 @@
           <a:bodyPr/>
           <a:lstStyle/>
           <a:p>
-            <a:fld id="{10F5DA9A-F8F8-4C09-9300-0EC11599EF1C}" type="slidenum">
+            <a:fld id="{B68EBE78-F976-4D8A-91AA-80465F9E6AE4}" type="slidenum">
               <a:rPr kumimoji="1" lang="ja-JP" altLang="en-US" smtClean="0"/>
               <a:t>‹#›</a:t>
             </a:fld>
@@ -552,7 +552,7 @@
     </p:spTree>
     <p:extLst>
       <p:ext uri="{BB962C8B-B14F-4D97-AF65-F5344CB8AC3E}">
-        <p14:creationId xmlns:p14="http://schemas.microsoft.com/office/powerpoint/2010/main" val="375557140"/>
+        <p14:creationId xmlns:p14="http://schemas.microsoft.com/office/powerpoint/2010/main" val="4130051560"/>
       </p:ext>
     </p:extLst>
   </p:cSld>
@@ -584,7 +584,7 @@
           <p:cNvPr id="2" name="縦書きタイトル 1">
             <a:extLst>
               <a:ext uri="{FF2B5EF4-FFF2-40B4-BE49-F238E27FC236}">
-                <a16:creationId xmlns:a16="http://schemas.microsoft.com/office/drawing/2014/main" id="{07E55F81-6C81-A909-7437-1833E6E9CE50}"/>
+                <a16:creationId xmlns:a16="http://schemas.microsoft.com/office/drawing/2014/main" id="{F54C0A86-90DF-CF77-54BB-1B090C0C8FBC}"/>
               </a:ext>
             </a:extLst>
           </p:cNvPr>
@@ -617,7 +617,7 @@
           <p:cNvPr id="3" name="縦書きテキスト プレースホルダー 2">
             <a:extLst>
               <a:ext uri="{FF2B5EF4-FFF2-40B4-BE49-F238E27FC236}">
-                <a16:creationId xmlns:a16="http://schemas.microsoft.com/office/drawing/2014/main" id="{EF31EDC4-EBAE-85CB-48E3-AE83578E1B1F}"/>
+                <a16:creationId xmlns:a16="http://schemas.microsoft.com/office/drawing/2014/main" id="{3F3DCECD-9D3E-304E-81FB-40ECEA00850A}"/>
               </a:ext>
             </a:extLst>
           </p:cNvPr>
@@ -711,7 +711,7 @@
           <p:cNvPr id="4" name="日付プレースホルダー 3">
             <a:extLst>
               <a:ext uri="{FF2B5EF4-FFF2-40B4-BE49-F238E27FC236}">
-                <a16:creationId xmlns:a16="http://schemas.microsoft.com/office/drawing/2014/main" id="{87B395F5-A5C0-3DD5-CB41-2666801DA71A}"/>
+                <a16:creationId xmlns:a16="http://schemas.microsoft.com/office/drawing/2014/main" id="{3E140ABC-0A9A-9A0D-4544-98710DA51281}"/>
               </a:ext>
             </a:extLst>
           </p:cNvPr>
@@ -727,7 +727,7 @@
           <a:bodyPr/>
           <a:lstStyle/>
           <a:p>
-            <a:fld id="{4F006E82-A5AF-4F83-A870-9792E322D5C0}" type="datetimeFigureOut">
+            <a:fld id="{0677DD58-899E-4880-BE38-D698A82DE6D0}" type="datetimeFigureOut">
               <a:rPr kumimoji="1" lang="ja-JP" altLang="en-US" smtClean="0"/>
               <a:t>2026/7/30</a:t>
             </a:fld>
@@ -740,7 +740,7 @@
           <p:cNvPr id="5" name="フッター プレースホルダー 4">
             <a:extLst>
               <a:ext uri="{FF2B5EF4-FFF2-40B4-BE49-F238E27FC236}">
-                <a16:creationId xmlns:a16="http://schemas.microsoft.com/office/drawing/2014/main" id="{A559A743-E4E9-7D9B-7131-FD2154D85EC4}"/>
+                <a16:creationId xmlns:a16="http://schemas.microsoft.com/office/drawing/2014/main" id="{30306F3B-9FF4-5057-977D-204FD35B270D}"/>
               </a:ext>
             </a:extLst>
           </p:cNvPr>
@@ -765,7 +765,7 @@
           <p:cNvPr id="6" name="スライド番号プレースホルダー 5">
             <a:extLst>
               <a:ext uri="{FF2B5EF4-FFF2-40B4-BE49-F238E27FC236}">
-                <a16:creationId xmlns:a16="http://schemas.microsoft.com/office/drawing/2014/main" id="{C0CC9666-44B6-26AC-5CE7-2BCEC6CBB8D0}"/>
+                <a16:creationId xmlns:a16="http://schemas.microsoft.com/office/drawing/2014/main" id="{3EA1123A-EFDD-950F-EE15-AB2963A12C19}"/>
               </a:ext>
             </a:extLst>
           </p:cNvPr>
@@ -781,7 +781,7 @@
           <a:bodyPr/>
           <a:lstStyle/>
           <a:p>
-            <a:fld id="{10F5DA9A-F8F8-4C09-9300-0EC11599EF1C}" type="slidenum">
+            <a:fld id="{B68EBE78-F976-4D8A-91AA-80465F9E6AE4}" type="slidenum">
               <a:rPr kumimoji="1" lang="ja-JP" altLang="en-US" smtClean="0"/>
               <a:t>‹#›</a:t>
             </a:fld>
@@ -792,7 +792,7 @@
     </p:spTree>
     <p:extLst>
       <p:ext uri="{BB962C8B-B14F-4D97-AF65-F5344CB8AC3E}">
-        <p14:creationId xmlns:p14="http://schemas.microsoft.com/office/powerpoint/2010/main" val="1757116138"/>
+        <p14:creationId xmlns:p14="http://schemas.microsoft.com/office/powerpoint/2010/main" val="3508432978"/>
       </p:ext>
     </p:extLst>
   </p:cSld>
@@ -824,7 +824,7 @@
           <p:cNvPr id="2" name="タイトル 1">
             <a:extLst>
               <a:ext uri="{FF2B5EF4-FFF2-40B4-BE49-F238E27FC236}">
-                <a16:creationId xmlns:a16="http://schemas.microsoft.com/office/drawing/2014/main" id="{0AE02177-8BA4-B308-920E-0A4FAF9A449D}"/>
+                <a16:creationId xmlns:a16="http://schemas.microsoft.com/office/drawing/2014/main" id="{7542A455-C760-F09B-AE38-E2E2536373F0}"/>
               </a:ext>
             </a:extLst>
           </p:cNvPr>
@@ -852,7 +852,7 @@
           <p:cNvPr id="3" name="コンテンツ プレースホルダー 2">
             <a:extLst>
               <a:ext uri="{FF2B5EF4-FFF2-40B4-BE49-F238E27FC236}">
-                <a16:creationId xmlns:a16="http://schemas.microsoft.com/office/drawing/2014/main" id="{6FD0B883-3472-A897-7EAF-B8CFB1551141}"/>
+                <a16:creationId xmlns:a16="http://schemas.microsoft.com/office/drawing/2014/main" id="{860BE83B-681F-8982-AA78-F5EC8091031C}"/>
               </a:ext>
             </a:extLst>
           </p:cNvPr>
@@ -941,7 +941,7 @@
           <p:cNvPr id="4" name="日付プレースホルダー 3">
             <a:extLst>
               <a:ext uri="{FF2B5EF4-FFF2-40B4-BE49-F238E27FC236}">
-                <a16:creationId xmlns:a16="http://schemas.microsoft.com/office/drawing/2014/main" id="{C0AF1F32-3818-1A83-55B8-D6A6DFEAC3B1}"/>
+                <a16:creationId xmlns:a16="http://schemas.microsoft.com/office/drawing/2014/main" id="{AE64A741-844A-5F01-5694-534CB5B85EAB}"/>
               </a:ext>
             </a:extLst>
           </p:cNvPr>
@@ -957,7 +957,7 @@
           <a:bodyPr/>
           <a:lstStyle/>
           <a:p>
-            <a:fld id="{4F006E82-A5AF-4F83-A870-9792E322D5C0}" type="datetimeFigureOut">
+            <a:fld id="{0677DD58-899E-4880-BE38-D698A82DE6D0}" type="datetimeFigureOut">
               <a:rPr kumimoji="1" lang="ja-JP" altLang="en-US" smtClean="0"/>
               <a:t>2026/7/30</a:t>
             </a:fld>
@@ -970,7 +970,7 @@
           <p:cNvPr id="5" name="フッター プレースホルダー 4">
             <a:extLst>
               <a:ext uri="{FF2B5EF4-FFF2-40B4-BE49-F238E27FC236}">
-                <a16:creationId xmlns:a16="http://schemas.microsoft.com/office/drawing/2014/main" id="{FCC59332-EBC5-0CDE-978D-306193583D92}"/>
+                <a16:creationId xmlns:a16="http://schemas.microsoft.com/office/drawing/2014/main" id="{82701BF9-C744-8482-BB41-C6EDD7930870}"/>
               </a:ext>
             </a:extLst>
           </p:cNvPr>
@@ -995,7 +995,7 @@
           <p:cNvPr id="6" name="スライド番号プレースホルダー 5">
             <a:extLst>
               <a:ext uri="{FF2B5EF4-FFF2-40B4-BE49-F238E27FC236}">
-                <a16:creationId xmlns:a16="http://schemas.microsoft.com/office/drawing/2014/main" id="{D71657CC-D385-B6CE-989F-4AB4E6CAB52C}"/>
+                <a16:creationId xmlns:a16="http://schemas.microsoft.com/office/drawing/2014/main" id="{42B3D426-9F79-DABC-8787-2A448889A344}"/>
               </a:ext>
             </a:extLst>
           </p:cNvPr>
@@ -1011,7 +1011,7 @@
           <a:bodyPr/>
           <a:lstStyle/>
           <a:p>
-            <a:fld id="{10F5DA9A-F8F8-4C09-9300-0EC11599EF1C}" type="slidenum">
+            <a:fld id="{B68EBE78-F976-4D8A-91AA-80465F9E6AE4}" type="slidenum">
               <a:rPr kumimoji="1" lang="ja-JP" altLang="en-US" smtClean="0"/>
               <a:t>‹#›</a:t>
             </a:fld>
@@ -1022,7 +1022,7 @@
     </p:spTree>
     <p:extLst>
       <p:ext uri="{BB962C8B-B14F-4D97-AF65-F5344CB8AC3E}">
-        <p14:creationId xmlns:p14="http://schemas.microsoft.com/office/powerpoint/2010/main" val="1930124339"/>
+        <p14:creationId xmlns:p14="http://schemas.microsoft.com/office/powerpoint/2010/main" val="792790805"/>
       </p:ext>
     </p:extLst>
   </p:cSld>
@@ -1054,7 +1054,7 @@
           <p:cNvPr id="2" name="タイトル 1">
             <a:extLst>
               <a:ext uri="{FF2B5EF4-FFF2-40B4-BE49-F238E27FC236}">
-                <a16:creationId xmlns:a16="http://schemas.microsoft.com/office/drawing/2014/main" id="{B489D23C-A727-50BC-2B38-89A1B24069D7}"/>
+                <a16:creationId xmlns:a16="http://schemas.microsoft.com/office/drawing/2014/main" id="{7E659648-C677-46AC-4643-948FCF322104}"/>
               </a:ext>
             </a:extLst>
           </p:cNvPr>
@@ -1091,7 +1091,7 @@
           <p:cNvPr id="3" name="テキスト プレースホルダー 2">
             <a:extLst>
               <a:ext uri="{FF2B5EF4-FFF2-40B4-BE49-F238E27FC236}">
-                <a16:creationId xmlns:a16="http://schemas.microsoft.com/office/drawing/2014/main" id="{758D1BAF-D3C2-368E-69EB-3C6295743B19}"/>
+                <a16:creationId xmlns:a16="http://schemas.microsoft.com/office/drawing/2014/main" id="{2EA63950-1318-D8B5-E310-46A0A3B37993}"/>
               </a:ext>
             </a:extLst>
           </p:cNvPr>
@@ -1216,7 +1216,7 @@
           <p:cNvPr id="4" name="日付プレースホルダー 3">
             <a:extLst>
               <a:ext uri="{FF2B5EF4-FFF2-40B4-BE49-F238E27FC236}">
-                <a16:creationId xmlns:a16="http://schemas.microsoft.com/office/drawing/2014/main" id="{2E49B679-9CE7-79F2-6E21-1F346AF3E7B8}"/>
+                <a16:creationId xmlns:a16="http://schemas.microsoft.com/office/drawing/2014/main" id="{3DAD7F9F-2645-CFB3-5ADF-8CB2DD91BD7F}"/>
               </a:ext>
             </a:extLst>
           </p:cNvPr>
@@ -1232,7 +1232,7 @@
           <a:bodyPr/>
           <a:lstStyle/>
           <a:p>
-            <a:fld id="{4F006E82-A5AF-4F83-A870-9792E322D5C0}" type="datetimeFigureOut">
+            <a:fld id="{0677DD58-899E-4880-BE38-D698A82DE6D0}" type="datetimeFigureOut">
               <a:rPr kumimoji="1" lang="ja-JP" altLang="en-US" smtClean="0"/>
               <a:t>2026/7/30</a:t>
             </a:fld>
@@ -1245,7 +1245,7 @@
           <p:cNvPr id="5" name="フッター プレースホルダー 4">
             <a:extLst>
               <a:ext uri="{FF2B5EF4-FFF2-40B4-BE49-F238E27FC236}">
-                <a16:creationId xmlns:a16="http://schemas.microsoft.com/office/drawing/2014/main" id="{EF55D946-4B63-A35D-010D-B6DDD7364125}"/>
+                <a16:creationId xmlns:a16="http://schemas.microsoft.com/office/drawing/2014/main" id="{6053DD01-A1D8-E17B-17C0-584AFC1607F4}"/>
               </a:ext>
             </a:extLst>
           </p:cNvPr>
@@ -1270,7 +1270,7 @@
           <p:cNvPr id="6" name="スライド番号プレースホルダー 5">
             <a:extLst>
               <a:ext uri="{FF2B5EF4-FFF2-40B4-BE49-F238E27FC236}">
-                <a16:creationId xmlns:a16="http://schemas.microsoft.com/office/drawing/2014/main" id="{0F08B6B7-7C92-C404-A099-3FD86AD2CA16}"/>
+                <a16:creationId xmlns:a16="http://schemas.microsoft.com/office/drawing/2014/main" id="{22CA9423-A563-9C36-45DE-351855689425}"/>
               </a:ext>
             </a:extLst>
           </p:cNvPr>
@@ -1286,7 +1286,7 @@
           <a:bodyPr/>
           <a:lstStyle/>
           <a:p>
-            <a:fld id="{10F5DA9A-F8F8-4C09-9300-0EC11599EF1C}" type="slidenum">
+            <a:fld id="{B68EBE78-F976-4D8A-91AA-80465F9E6AE4}" type="slidenum">
               <a:rPr kumimoji="1" lang="ja-JP" altLang="en-US" smtClean="0"/>
               <a:t>‹#›</a:t>
             </a:fld>
@@ -1297,7 +1297,7 @@
     </p:spTree>
     <p:extLst>
       <p:ext uri="{BB962C8B-B14F-4D97-AF65-F5344CB8AC3E}">
-        <p14:creationId xmlns:p14="http://schemas.microsoft.com/office/powerpoint/2010/main" val="2274993790"/>
+        <p14:creationId xmlns:p14="http://schemas.microsoft.com/office/powerpoint/2010/main" val="3975216012"/>
       </p:ext>
     </p:extLst>
   </p:cSld>
@@ -1329,7 +1329,7 @@
           <p:cNvPr id="2" name="タイトル 1">
             <a:extLst>
               <a:ext uri="{FF2B5EF4-FFF2-40B4-BE49-F238E27FC236}">
-                <a16:creationId xmlns:a16="http://schemas.microsoft.com/office/drawing/2014/main" id="{C77CAC53-4FD2-DF85-80D4-85622D3362B6}"/>
+                <a16:creationId xmlns:a16="http://schemas.microsoft.com/office/drawing/2014/main" id="{00190294-4027-2C0D-C865-AB80A7F3D904}"/>
               </a:ext>
             </a:extLst>
           </p:cNvPr>
@@ -1357,7 +1357,7 @@
           <p:cNvPr id="3" name="コンテンツ プレースホルダー 2">
             <a:extLst>
               <a:ext uri="{FF2B5EF4-FFF2-40B4-BE49-F238E27FC236}">
-                <a16:creationId xmlns:a16="http://schemas.microsoft.com/office/drawing/2014/main" id="{803D4B95-099F-9C04-D5AD-32D9C51C466C}"/>
+                <a16:creationId xmlns:a16="http://schemas.microsoft.com/office/drawing/2014/main" id="{B5337773-1CD8-2B4D-71F9-87DB630B5FF4}"/>
               </a:ext>
             </a:extLst>
           </p:cNvPr>
@@ -1451,7 +1451,7 @@
           <p:cNvPr id="4" name="コンテンツ プレースホルダー 3">
             <a:extLst>
               <a:ext uri="{FF2B5EF4-FFF2-40B4-BE49-F238E27FC236}">
-                <a16:creationId xmlns:a16="http://schemas.microsoft.com/office/drawing/2014/main" id="{A0502DA4-C07F-52D1-789B-562E25EE894D}"/>
+                <a16:creationId xmlns:a16="http://schemas.microsoft.com/office/drawing/2014/main" id="{78688361-8466-00FB-9F62-C960D86306C2}"/>
               </a:ext>
             </a:extLst>
           </p:cNvPr>
@@ -1545,7 +1545,7 @@
           <p:cNvPr id="5" name="日付プレースホルダー 4">
             <a:extLst>
               <a:ext uri="{FF2B5EF4-FFF2-40B4-BE49-F238E27FC236}">
-                <a16:creationId xmlns:a16="http://schemas.microsoft.com/office/drawing/2014/main" id="{3A2DD8D5-D46C-9EDD-78BA-B0EEB625B42E}"/>
+                <a16:creationId xmlns:a16="http://schemas.microsoft.com/office/drawing/2014/main" id="{A08C544B-252C-7C62-7372-93BB56868052}"/>
               </a:ext>
             </a:extLst>
           </p:cNvPr>
@@ -1561,7 +1561,7 @@
           <a:bodyPr/>
           <a:lstStyle/>
           <a:p>
-            <a:fld id="{4F006E82-A5AF-4F83-A870-9792E322D5C0}" type="datetimeFigureOut">
+            <a:fld id="{0677DD58-899E-4880-BE38-D698A82DE6D0}" type="datetimeFigureOut">
               <a:rPr kumimoji="1" lang="ja-JP" altLang="en-US" smtClean="0"/>
               <a:t>2026/7/30</a:t>
             </a:fld>
@@ -1574,7 +1574,7 @@
           <p:cNvPr id="6" name="フッター プレースホルダー 5">
             <a:extLst>
               <a:ext uri="{FF2B5EF4-FFF2-40B4-BE49-F238E27FC236}">
-                <a16:creationId xmlns:a16="http://schemas.microsoft.com/office/drawing/2014/main" id="{B7CF710F-A5BC-31A2-0C2E-B3D74DE19B86}"/>
+                <a16:creationId xmlns:a16="http://schemas.microsoft.com/office/drawing/2014/main" id="{0418CEA5-55AC-25B7-EEA1-9EBA48A382BD}"/>
               </a:ext>
             </a:extLst>
           </p:cNvPr>
@@ -1599,7 +1599,7 @@
           <p:cNvPr id="7" name="スライド番号プレースホルダー 6">
             <a:extLst>
               <a:ext uri="{FF2B5EF4-FFF2-40B4-BE49-F238E27FC236}">
-                <a16:creationId xmlns:a16="http://schemas.microsoft.com/office/drawing/2014/main" id="{C3467836-00F0-379A-D455-4F5BA7635499}"/>
+                <a16:creationId xmlns:a16="http://schemas.microsoft.com/office/drawing/2014/main" id="{D3B11562-695F-3C8F-931C-ED439EFEDC09}"/>
               </a:ext>
             </a:extLst>
           </p:cNvPr>
@@ -1615,7 +1615,7 @@
           <a:bodyPr/>
           <a:lstStyle/>
           <a:p>
-            <a:fld id="{10F5DA9A-F8F8-4C09-9300-0EC11599EF1C}" type="slidenum">
+            <a:fld id="{B68EBE78-F976-4D8A-91AA-80465F9E6AE4}" type="slidenum">
               <a:rPr kumimoji="1" lang="ja-JP" altLang="en-US" smtClean="0"/>
               <a:t>‹#›</a:t>
             </a:fld>
@@ -1626,7 +1626,7 @@
     </p:spTree>
     <p:extLst>
       <p:ext uri="{BB962C8B-B14F-4D97-AF65-F5344CB8AC3E}">
-        <p14:creationId xmlns:p14="http://schemas.microsoft.com/office/powerpoint/2010/main" val="228503520"/>
+        <p14:creationId xmlns:p14="http://schemas.microsoft.com/office/powerpoint/2010/main" val="2579348786"/>
       </p:ext>
     </p:extLst>
   </p:cSld>
@@ -1658,7 +1658,7 @@
           <p:cNvPr id="2" name="タイトル 1">
             <a:extLst>
               <a:ext uri="{FF2B5EF4-FFF2-40B4-BE49-F238E27FC236}">
-                <a16:creationId xmlns:a16="http://schemas.microsoft.com/office/drawing/2014/main" id="{F84C44FE-87A5-649E-62D2-B00D98BA3F10}"/>
+                <a16:creationId xmlns:a16="http://schemas.microsoft.com/office/drawing/2014/main" id="{E49BDEB9-3E6B-8C7C-5D54-E7BB90F974A6}"/>
               </a:ext>
             </a:extLst>
           </p:cNvPr>
@@ -1691,7 +1691,7 @@
           <p:cNvPr id="3" name="テキスト プレースホルダー 2">
             <a:extLst>
               <a:ext uri="{FF2B5EF4-FFF2-40B4-BE49-F238E27FC236}">
-                <a16:creationId xmlns:a16="http://schemas.microsoft.com/office/drawing/2014/main" id="{0D0E3DA2-FD7E-DC17-0479-2DC37825EFD5}"/>
+                <a16:creationId xmlns:a16="http://schemas.microsoft.com/office/drawing/2014/main" id="{50034E53-E3CB-3FEA-7C3B-FC15507F00A3}"/>
               </a:ext>
             </a:extLst>
           </p:cNvPr>
@@ -1762,7 +1762,7 @@
           <p:cNvPr id="4" name="コンテンツ プレースホルダー 3">
             <a:extLst>
               <a:ext uri="{FF2B5EF4-FFF2-40B4-BE49-F238E27FC236}">
-                <a16:creationId xmlns:a16="http://schemas.microsoft.com/office/drawing/2014/main" id="{CE821173-063B-53D1-C8B6-B22D3862B31F}"/>
+                <a16:creationId xmlns:a16="http://schemas.microsoft.com/office/drawing/2014/main" id="{11F552E9-F077-1906-CB49-B2E3AAE9F231}"/>
               </a:ext>
             </a:extLst>
           </p:cNvPr>
@@ -1856,7 +1856,7 @@
           <p:cNvPr id="5" name="テキスト プレースホルダー 4">
             <a:extLst>
               <a:ext uri="{FF2B5EF4-FFF2-40B4-BE49-F238E27FC236}">
-                <a16:creationId xmlns:a16="http://schemas.microsoft.com/office/drawing/2014/main" id="{2768A146-1CB7-45DA-8DBF-4F162EFB8D2A}"/>
+                <a16:creationId xmlns:a16="http://schemas.microsoft.com/office/drawing/2014/main" id="{0F6D58C7-B89D-2648-86E6-261C540395E6}"/>
               </a:ext>
             </a:extLst>
           </p:cNvPr>
@@ -1927,7 +1927,7 @@
           <p:cNvPr id="6" name="コンテンツ プレースホルダー 5">
             <a:extLst>
               <a:ext uri="{FF2B5EF4-FFF2-40B4-BE49-F238E27FC236}">
-                <a16:creationId xmlns:a16="http://schemas.microsoft.com/office/drawing/2014/main" id="{45EB5B54-49F9-7A00-23B9-AA9F7A9F309B}"/>
+                <a16:creationId xmlns:a16="http://schemas.microsoft.com/office/drawing/2014/main" id="{B2DD185E-8A85-8452-9726-E48AA0E59D15}"/>
               </a:ext>
             </a:extLst>
           </p:cNvPr>
@@ -2021,7 +2021,7 @@
           <p:cNvPr id="7" name="日付プレースホルダー 6">
             <a:extLst>
               <a:ext uri="{FF2B5EF4-FFF2-40B4-BE49-F238E27FC236}">
-                <a16:creationId xmlns:a16="http://schemas.microsoft.com/office/drawing/2014/main" id="{45B7549B-A2FF-D98E-2E15-3272A741AF97}"/>
+                <a16:creationId xmlns:a16="http://schemas.microsoft.com/office/drawing/2014/main" id="{5CDC64EF-9B3F-20F1-F913-C35AE0371BE0}"/>
               </a:ext>
             </a:extLst>
           </p:cNvPr>
@@ -2037,7 +2037,7 @@
           <a:bodyPr/>
           <a:lstStyle/>
           <a:p>
-            <a:fld id="{4F006E82-A5AF-4F83-A870-9792E322D5C0}" type="datetimeFigureOut">
+            <a:fld id="{0677DD58-899E-4880-BE38-D698A82DE6D0}" type="datetimeFigureOut">
               <a:rPr kumimoji="1" lang="ja-JP" altLang="en-US" smtClean="0"/>
               <a:t>2026/7/30</a:t>
             </a:fld>
@@ -2050,7 +2050,7 @@
           <p:cNvPr id="8" name="フッター プレースホルダー 7">
             <a:extLst>
               <a:ext uri="{FF2B5EF4-FFF2-40B4-BE49-F238E27FC236}">
-                <a16:creationId xmlns:a16="http://schemas.microsoft.com/office/drawing/2014/main" id="{5617AC7F-822C-FFA2-F3A5-5C89D4E625AB}"/>
+                <a16:creationId xmlns:a16="http://schemas.microsoft.com/office/drawing/2014/main" id="{83225C67-746B-7482-534B-0E552B9E9B6E}"/>
               </a:ext>
             </a:extLst>
           </p:cNvPr>
@@ -2075,7 +2075,7 @@
           <p:cNvPr id="9" name="スライド番号プレースホルダー 8">
             <a:extLst>
               <a:ext uri="{FF2B5EF4-FFF2-40B4-BE49-F238E27FC236}">
-                <a16:creationId xmlns:a16="http://schemas.microsoft.com/office/drawing/2014/main" id="{EE2EC311-BDA1-2735-9D18-392DB78C2AD9}"/>
+                <a16:creationId xmlns:a16="http://schemas.microsoft.com/office/drawing/2014/main" id="{DD495F10-E41C-0919-6ECF-63E5947BDC2A}"/>
               </a:ext>
             </a:extLst>
           </p:cNvPr>
@@ -2091,7 +2091,7 @@
           <a:bodyPr/>
           <a:lstStyle/>
           <a:p>
-            <a:fld id="{10F5DA9A-F8F8-4C09-9300-0EC11599EF1C}" type="slidenum">
+            <a:fld id="{B68EBE78-F976-4D8A-91AA-80465F9E6AE4}" type="slidenum">
               <a:rPr kumimoji="1" lang="ja-JP" altLang="en-US" smtClean="0"/>
               <a:t>‹#›</a:t>
             </a:fld>
@@ -2102,7 +2102,7 @@
     </p:spTree>
     <p:extLst>
       <p:ext uri="{BB962C8B-B14F-4D97-AF65-F5344CB8AC3E}">
-        <p14:creationId xmlns:p14="http://schemas.microsoft.com/office/powerpoint/2010/main" val="1999454841"/>
+        <p14:creationId xmlns:p14="http://schemas.microsoft.com/office/powerpoint/2010/main" val="3939569128"/>
       </p:ext>
     </p:extLst>
   </p:cSld>
@@ -2134,7 +2134,7 @@
           <p:cNvPr id="2" name="タイトル 1">
             <a:extLst>
               <a:ext uri="{FF2B5EF4-FFF2-40B4-BE49-F238E27FC236}">
-                <a16:creationId xmlns:a16="http://schemas.microsoft.com/office/drawing/2014/main" id="{794838AE-2BCC-9C8A-6D76-98E98015B84A}"/>
+                <a16:creationId xmlns:a16="http://schemas.microsoft.com/office/drawing/2014/main" id="{16FF61B3-32D1-F9E6-A8EA-01B0AEC28859}"/>
               </a:ext>
             </a:extLst>
           </p:cNvPr>
@@ -2162,7 +2162,7 @@
           <p:cNvPr id="3" name="日付プレースホルダー 2">
             <a:extLst>
               <a:ext uri="{FF2B5EF4-FFF2-40B4-BE49-F238E27FC236}">
-                <a16:creationId xmlns:a16="http://schemas.microsoft.com/office/drawing/2014/main" id="{548960A0-65F4-2EE5-CE10-23624732755E}"/>
+                <a16:creationId xmlns:a16="http://schemas.microsoft.com/office/drawing/2014/main" id="{6A9D5D10-CC60-8CC7-5B2B-C1D8A8648B33}"/>
               </a:ext>
             </a:extLst>
           </p:cNvPr>
@@ -2178,7 +2178,7 @@
           <a:bodyPr/>
           <a:lstStyle/>
           <a:p>
-            <a:fld id="{4F006E82-A5AF-4F83-A870-9792E322D5C0}" type="datetimeFigureOut">
+            <a:fld id="{0677DD58-899E-4880-BE38-D698A82DE6D0}" type="datetimeFigureOut">
               <a:rPr kumimoji="1" lang="ja-JP" altLang="en-US" smtClean="0"/>
               <a:t>2026/7/30</a:t>
             </a:fld>
@@ -2191,7 +2191,7 @@
           <p:cNvPr id="4" name="フッター プレースホルダー 3">
             <a:extLst>
               <a:ext uri="{FF2B5EF4-FFF2-40B4-BE49-F238E27FC236}">
-                <a16:creationId xmlns:a16="http://schemas.microsoft.com/office/drawing/2014/main" id="{357175BD-A4EB-A8A1-1D67-645B10CFDFE8}"/>
+                <a16:creationId xmlns:a16="http://schemas.microsoft.com/office/drawing/2014/main" id="{79E3ECC8-9F51-1CFE-43EC-142D1872CECC}"/>
               </a:ext>
             </a:extLst>
           </p:cNvPr>
@@ -2216,7 +2216,7 @@
           <p:cNvPr id="5" name="スライド番号プレースホルダー 4">
             <a:extLst>
               <a:ext uri="{FF2B5EF4-FFF2-40B4-BE49-F238E27FC236}">
-                <a16:creationId xmlns:a16="http://schemas.microsoft.com/office/drawing/2014/main" id="{7C7B6AC4-ACE4-38C9-61C1-53D20AFF4F65}"/>
+                <a16:creationId xmlns:a16="http://schemas.microsoft.com/office/drawing/2014/main" id="{D17D2833-2C13-0A5F-3E29-213F04E060EF}"/>
               </a:ext>
             </a:extLst>
           </p:cNvPr>
@@ -2232,7 +2232,7 @@
           <a:bodyPr/>
           <a:lstStyle/>
           <a:p>
-            <a:fld id="{10F5DA9A-F8F8-4C09-9300-0EC11599EF1C}" type="slidenum">
+            <a:fld id="{B68EBE78-F976-4D8A-91AA-80465F9E6AE4}" type="slidenum">
               <a:rPr kumimoji="1" lang="ja-JP" altLang="en-US" smtClean="0"/>
               <a:t>‹#›</a:t>
             </a:fld>
@@ -2243,7 +2243,7 @@
     </p:spTree>
     <p:extLst>
       <p:ext uri="{BB962C8B-B14F-4D97-AF65-F5344CB8AC3E}">
-        <p14:creationId xmlns:p14="http://schemas.microsoft.com/office/powerpoint/2010/main" val="2641157321"/>
+        <p14:creationId xmlns:p14="http://schemas.microsoft.com/office/powerpoint/2010/main" val="2694950613"/>
       </p:ext>
     </p:extLst>
   </p:cSld>
@@ -2275,7 +2275,7 @@
           <p:cNvPr id="2" name="日付プレースホルダー 1">
             <a:extLst>
               <a:ext uri="{FF2B5EF4-FFF2-40B4-BE49-F238E27FC236}">
-                <a16:creationId xmlns:a16="http://schemas.microsoft.com/office/drawing/2014/main" id="{372F9DDF-FF25-1BE2-C4DB-5B7DE090996E}"/>
+                <a16:creationId xmlns:a16="http://schemas.microsoft.com/office/drawing/2014/main" id="{6584304C-5F67-FA19-7BDA-C8079329CE6F}"/>
               </a:ext>
             </a:extLst>
           </p:cNvPr>
@@ -2291,7 +2291,7 @@
           <a:bodyPr/>
           <a:lstStyle/>
           <a:p>
-            <a:fld id="{4F006E82-A5AF-4F83-A870-9792E322D5C0}" type="datetimeFigureOut">
+            <a:fld id="{0677DD58-899E-4880-BE38-D698A82DE6D0}" type="datetimeFigureOut">
               <a:rPr kumimoji="1" lang="ja-JP" altLang="en-US" smtClean="0"/>
               <a:t>2026/7/30</a:t>
             </a:fld>
@@ -2304,7 +2304,7 @@
           <p:cNvPr id="3" name="フッター プレースホルダー 2">
             <a:extLst>
               <a:ext uri="{FF2B5EF4-FFF2-40B4-BE49-F238E27FC236}">
-                <a16:creationId xmlns:a16="http://schemas.microsoft.com/office/drawing/2014/main" id="{2392B43F-64C2-ED13-9E9A-F96BFDBA0ABF}"/>
+                <a16:creationId xmlns:a16="http://schemas.microsoft.com/office/drawing/2014/main" id="{F21E9AD6-144C-4C7E-445E-87648C09453F}"/>
               </a:ext>
             </a:extLst>
           </p:cNvPr>
@@ -2329,7 +2329,7 @@
           <p:cNvPr id="4" name="スライド番号プレースホルダー 3">
             <a:extLst>
               <a:ext uri="{FF2B5EF4-FFF2-40B4-BE49-F238E27FC236}">
-                <a16:creationId xmlns:a16="http://schemas.microsoft.com/office/drawing/2014/main" id="{14056842-0360-3067-CE8C-159117AA7C26}"/>
+                <a16:creationId xmlns:a16="http://schemas.microsoft.com/office/drawing/2014/main" id="{CF576486-F348-A4D7-212D-33770CBFD11B}"/>
               </a:ext>
             </a:extLst>
           </p:cNvPr>
@@ -2345,7 +2345,7 @@
           <a:bodyPr/>
           <a:lstStyle/>
           <a:p>
-            <a:fld id="{10F5DA9A-F8F8-4C09-9300-0EC11599EF1C}" type="slidenum">
+            <a:fld id="{B68EBE78-F976-4D8A-91AA-80465F9E6AE4}" type="slidenum">
               <a:rPr kumimoji="1" lang="ja-JP" altLang="en-US" smtClean="0"/>
               <a:t>‹#›</a:t>
             </a:fld>
@@ -2356,7 +2356,7 @@
     </p:spTree>
     <p:extLst>
       <p:ext uri="{BB962C8B-B14F-4D97-AF65-F5344CB8AC3E}">
-        <p14:creationId xmlns:p14="http://schemas.microsoft.com/office/powerpoint/2010/main" val="4204045368"/>
+        <p14:creationId xmlns:p14="http://schemas.microsoft.com/office/powerpoint/2010/main" val="3132496279"/>
       </p:ext>
     </p:extLst>
   </p:cSld>
@@ -2388,7 +2388,7 @@
           <p:cNvPr id="2" name="タイトル 1">
             <a:extLst>
               <a:ext uri="{FF2B5EF4-FFF2-40B4-BE49-F238E27FC236}">
-                <a16:creationId xmlns:a16="http://schemas.microsoft.com/office/drawing/2014/main" id="{2087630A-CA6F-BD75-C31A-7805008A1E8A}"/>
+                <a16:creationId xmlns:a16="http://schemas.microsoft.com/office/drawing/2014/main" id="{30DEDFBC-8B0C-8749-45FF-A40328FD7EAB}"/>
               </a:ext>
             </a:extLst>
           </p:cNvPr>
@@ -2425,7 +2425,7 @@
           <p:cNvPr id="3" name="コンテンツ プレースホルダー 2">
             <a:extLst>
               <a:ext uri="{FF2B5EF4-FFF2-40B4-BE49-F238E27FC236}">
-                <a16:creationId xmlns:a16="http://schemas.microsoft.com/office/drawing/2014/main" id="{60CD2069-497E-2D57-7C91-FD71BDED626E}"/>
+                <a16:creationId xmlns:a16="http://schemas.microsoft.com/office/drawing/2014/main" id="{DCC29288-EFF5-D1AE-F518-1FB681F8BBD5}"/>
               </a:ext>
             </a:extLst>
           </p:cNvPr>
@@ -2547,7 +2547,7 @@
           <p:cNvPr id="4" name="テキスト プレースホルダー 3">
             <a:extLst>
               <a:ext uri="{FF2B5EF4-FFF2-40B4-BE49-F238E27FC236}">
-                <a16:creationId xmlns:a16="http://schemas.microsoft.com/office/drawing/2014/main" id="{7B52A2D1-0D10-A3D4-DA56-C8E13D30C0FB}"/>
+                <a16:creationId xmlns:a16="http://schemas.microsoft.com/office/drawing/2014/main" id="{6CD4B7AA-AAA5-E9C8-166B-C797D0025076}"/>
               </a:ext>
             </a:extLst>
           </p:cNvPr>
@@ -2618,7 +2618,7 @@
           <p:cNvPr id="5" name="日付プレースホルダー 4">
             <a:extLst>
               <a:ext uri="{FF2B5EF4-FFF2-40B4-BE49-F238E27FC236}">
-                <a16:creationId xmlns:a16="http://schemas.microsoft.com/office/drawing/2014/main" id="{259F6511-A0C0-36BA-9A5A-45320A29DF0D}"/>
+                <a16:creationId xmlns:a16="http://schemas.microsoft.com/office/drawing/2014/main" id="{460D94D2-CC2F-5C4D-6805-14B5C9FB821E}"/>
               </a:ext>
             </a:extLst>
           </p:cNvPr>
@@ -2634,7 +2634,7 @@
           <a:bodyPr/>
           <a:lstStyle/>
           <a:p>
-            <a:fld id="{4F006E82-A5AF-4F83-A870-9792E322D5C0}" type="datetimeFigureOut">
+            <a:fld id="{0677DD58-899E-4880-BE38-D698A82DE6D0}" type="datetimeFigureOut">
               <a:rPr kumimoji="1" lang="ja-JP" altLang="en-US" smtClean="0"/>
               <a:t>2026/7/30</a:t>
             </a:fld>
@@ -2647,7 +2647,7 @@
           <p:cNvPr id="6" name="フッター プレースホルダー 5">
             <a:extLst>
               <a:ext uri="{FF2B5EF4-FFF2-40B4-BE49-F238E27FC236}">
-                <a16:creationId xmlns:a16="http://schemas.microsoft.com/office/drawing/2014/main" id="{AB0BE901-3A12-C0A2-55BB-6D9880E81297}"/>
+                <a16:creationId xmlns:a16="http://schemas.microsoft.com/office/drawing/2014/main" id="{8209FFBF-9D5F-9C10-7F6E-04D2142F7CB9}"/>
               </a:ext>
             </a:extLst>
           </p:cNvPr>
@@ -2672,7 +2672,7 @@
           <p:cNvPr id="7" name="スライド番号プレースホルダー 6">
             <a:extLst>
               <a:ext uri="{FF2B5EF4-FFF2-40B4-BE49-F238E27FC236}">
-                <a16:creationId xmlns:a16="http://schemas.microsoft.com/office/drawing/2014/main" id="{E31428E8-189E-036F-34FB-7010B040AD36}"/>
+                <a16:creationId xmlns:a16="http://schemas.microsoft.com/office/drawing/2014/main" id="{D3E8E670-2D69-82BD-230C-CC7E5347C262}"/>
               </a:ext>
             </a:extLst>
           </p:cNvPr>
@@ -2688,7 +2688,7 @@
           <a:bodyPr/>
           <a:lstStyle/>
           <a:p>
-            <a:fld id="{10F5DA9A-F8F8-4C09-9300-0EC11599EF1C}" type="slidenum">
+            <a:fld id="{B68EBE78-F976-4D8A-91AA-80465F9E6AE4}" type="slidenum">
               <a:rPr kumimoji="1" lang="ja-JP" altLang="en-US" smtClean="0"/>
               <a:t>‹#›</a:t>
             </a:fld>
@@ -2699,7 +2699,7 @@
     </p:spTree>
     <p:extLst>
       <p:ext uri="{BB962C8B-B14F-4D97-AF65-F5344CB8AC3E}">
-        <p14:creationId xmlns:p14="http://schemas.microsoft.com/office/powerpoint/2010/main" val="72548393"/>
+        <p14:creationId xmlns:p14="http://schemas.microsoft.com/office/powerpoint/2010/main" val="1317438275"/>
       </p:ext>
     </p:extLst>
   </p:cSld>
@@ -2731,7 +2731,7 @@
           <p:cNvPr id="2" name="タイトル 1">
             <a:extLst>
               <a:ext uri="{FF2B5EF4-FFF2-40B4-BE49-F238E27FC236}">
-                <a16:creationId xmlns:a16="http://schemas.microsoft.com/office/drawing/2014/main" id="{A32FC356-8AEC-884D-7F92-0862844B66DA}"/>
+                <a16:creationId xmlns:a16="http://schemas.microsoft.com/office/drawing/2014/main" id="{289A9D04-FFBF-BD8D-B063-964DFC38721E}"/>
               </a:ext>
             </a:extLst>
           </p:cNvPr>
@@ -2768,7 +2768,7 @@
           <p:cNvPr id="3" name="図プレースホルダー 2">
             <a:extLst>
               <a:ext uri="{FF2B5EF4-FFF2-40B4-BE49-F238E27FC236}">
-                <a16:creationId xmlns:a16="http://schemas.microsoft.com/office/drawing/2014/main" id="{27C3AE17-CFF6-918F-1933-0870F9625DB5}"/>
+                <a16:creationId xmlns:a16="http://schemas.microsoft.com/office/drawing/2014/main" id="{BBAB5ABB-69C6-E49D-0946-992453B169C6}"/>
               </a:ext>
             </a:extLst>
           </p:cNvPr>
@@ -2835,7 +2835,7 @@
           <p:cNvPr id="4" name="テキスト プレースホルダー 3">
             <a:extLst>
               <a:ext uri="{FF2B5EF4-FFF2-40B4-BE49-F238E27FC236}">
-                <a16:creationId xmlns:a16="http://schemas.microsoft.com/office/drawing/2014/main" id="{06C1755C-6F0F-F6BB-7CCA-ECFC095E1037}"/>
+                <a16:creationId xmlns:a16="http://schemas.microsoft.com/office/drawing/2014/main" id="{7F923FB5-AE08-E53C-047E-F1D2E0ED695E}"/>
               </a:ext>
             </a:extLst>
           </p:cNvPr>
@@ -2906,7 +2906,7 @@
           <p:cNvPr id="5" name="日付プレースホルダー 4">
             <a:extLst>
               <a:ext uri="{FF2B5EF4-FFF2-40B4-BE49-F238E27FC236}">
-                <a16:creationId xmlns:a16="http://schemas.microsoft.com/office/drawing/2014/main" id="{C0E19741-DC25-D9F9-C132-86A3E80AEA5C}"/>
+                <a16:creationId xmlns:a16="http://schemas.microsoft.com/office/drawing/2014/main" id="{18FCD280-E9AD-81E2-3459-7365A14F5052}"/>
               </a:ext>
             </a:extLst>
           </p:cNvPr>
@@ -2922,7 +2922,7 @@
           <a:bodyPr/>
           <a:lstStyle/>
           <a:p>
-            <a:fld id="{4F006E82-A5AF-4F83-A870-9792E322D5C0}" type="datetimeFigureOut">
+            <a:fld id="{0677DD58-899E-4880-BE38-D698A82DE6D0}" type="datetimeFigureOut">
               <a:rPr kumimoji="1" lang="ja-JP" altLang="en-US" smtClean="0"/>
               <a:t>2026/7/30</a:t>
             </a:fld>
@@ -2935,7 +2935,7 @@
           <p:cNvPr id="6" name="フッター プレースホルダー 5">
             <a:extLst>
               <a:ext uri="{FF2B5EF4-FFF2-40B4-BE49-F238E27FC236}">
-                <a16:creationId xmlns:a16="http://schemas.microsoft.com/office/drawing/2014/main" id="{C45E0CA6-1395-7D0A-1117-646F8E64F2CE}"/>
+                <a16:creationId xmlns:a16="http://schemas.microsoft.com/office/drawing/2014/main" id="{40FADF32-E993-97D9-24B8-F12B76625896}"/>
               </a:ext>
             </a:extLst>
           </p:cNvPr>
@@ -2960,7 +2960,7 @@
           <p:cNvPr id="7" name="スライド番号プレースホルダー 6">
             <a:extLst>
               <a:ext uri="{FF2B5EF4-FFF2-40B4-BE49-F238E27FC236}">
-                <a16:creationId xmlns:a16="http://schemas.microsoft.com/office/drawing/2014/main" id="{17DCC532-209B-34B4-21CE-0CB2E09A8235}"/>
+                <a16:creationId xmlns:a16="http://schemas.microsoft.com/office/drawing/2014/main" id="{205DB27F-1AF7-6AB0-B113-7CAB056947A4}"/>
               </a:ext>
             </a:extLst>
           </p:cNvPr>
@@ -2976,7 +2976,7 @@
           <a:bodyPr/>
           <a:lstStyle/>
           <a:p>
-            <a:fld id="{10F5DA9A-F8F8-4C09-9300-0EC11599EF1C}" type="slidenum">
+            <a:fld id="{B68EBE78-F976-4D8A-91AA-80465F9E6AE4}" type="slidenum">
               <a:rPr kumimoji="1" lang="ja-JP" altLang="en-US" smtClean="0"/>
               <a:t>‹#›</a:t>
             </a:fld>
@@ -2987,7 +2987,7 @@
     </p:spTree>
     <p:extLst>
       <p:ext uri="{BB962C8B-B14F-4D97-AF65-F5344CB8AC3E}">
-        <p14:creationId xmlns:p14="http://schemas.microsoft.com/office/powerpoint/2010/main" val="3105954718"/>
+        <p14:creationId xmlns:p14="http://schemas.microsoft.com/office/powerpoint/2010/main" val="4271809720"/>
       </p:ext>
     </p:extLst>
   </p:cSld>
@@ -3024,7 +3024,7 @@
           <p:cNvPr id="2" name="タイトル プレースホルダー 1">
             <a:extLst>
               <a:ext uri="{FF2B5EF4-FFF2-40B4-BE49-F238E27FC236}">
-                <a16:creationId xmlns:a16="http://schemas.microsoft.com/office/drawing/2014/main" id="{9295601B-B15A-479F-9399-E62F21EEFFD8}"/>
+                <a16:creationId xmlns:a16="http://schemas.microsoft.com/office/drawing/2014/main" id="{0EBAA253-2787-CCE2-2325-ED1B506D8AA7}"/>
               </a:ext>
             </a:extLst>
           </p:cNvPr>
@@ -3062,7 +3062,7 @@
           <p:cNvPr id="3" name="テキスト プレースホルダー 2">
             <a:extLst>
               <a:ext uri="{FF2B5EF4-FFF2-40B4-BE49-F238E27FC236}">
-                <a16:creationId xmlns:a16="http://schemas.microsoft.com/office/drawing/2014/main" id="{7F164F81-40F6-D577-5CB6-86525AFB2C2D}"/>
+                <a16:creationId xmlns:a16="http://schemas.microsoft.com/office/drawing/2014/main" id="{96C58474-A6AA-F94A-245D-BF576AF7C774}"/>
               </a:ext>
             </a:extLst>
           </p:cNvPr>
@@ -3161,7 +3161,7 @@
           <p:cNvPr id="4" name="日付プレースホルダー 3">
             <a:extLst>
               <a:ext uri="{FF2B5EF4-FFF2-40B4-BE49-F238E27FC236}">
-                <a16:creationId xmlns:a16="http://schemas.microsoft.com/office/drawing/2014/main" id="{91C9A47A-71D3-E1FC-6CF1-BE9BA9370733}"/>
+                <a16:creationId xmlns:a16="http://schemas.microsoft.com/office/drawing/2014/main" id="{816AFA12-359A-9074-8012-C0D3E76385A6}"/>
               </a:ext>
             </a:extLst>
           </p:cNvPr>
@@ -3195,7 +3195,7 @@
             </a:lvl1pPr>
           </a:lstStyle>
           <a:p>
-            <a:fld id="{4F006E82-A5AF-4F83-A870-9792E322D5C0}" type="datetimeFigureOut">
+            <a:fld id="{0677DD58-899E-4880-BE38-D698A82DE6D0}" type="datetimeFigureOut">
               <a:rPr kumimoji="1" lang="ja-JP" altLang="en-US" smtClean="0"/>
               <a:t>2026/7/30</a:t>
             </a:fld>
@@ -3208,7 +3208,7 @@
           <p:cNvPr id="5" name="フッター プレースホルダー 4">
             <a:extLst>
               <a:ext uri="{FF2B5EF4-FFF2-40B4-BE49-F238E27FC236}">
-                <a16:creationId xmlns:a16="http://schemas.microsoft.com/office/drawing/2014/main" id="{BB6A8066-110C-D5F6-2A1F-E71B691CE58D}"/>
+                <a16:creationId xmlns:a16="http://schemas.microsoft.com/office/drawing/2014/main" id="{571A2C08-DB3B-2E1A-4306-01EFBCCA9DB5}"/>
               </a:ext>
             </a:extLst>
           </p:cNvPr>
@@ -3251,7 +3251,7 @@
           <p:cNvPr id="6" name="スライド番号プレースホルダー 5">
             <a:extLst>
               <a:ext uri="{FF2B5EF4-FFF2-40B4-BE49-F238E27FC236}">
-                <a16:creationId xmlns:a16="http://schemas.microsoft.com/office/drawing/2014/main" id="{11FADF8B-2F68-3CE2-5668-CDA99BDBB040}"/>
+                <a16:creationId xmlns:a16="http://schemas.microsoft.com/office/drawing/2014/main" id="{A3D5286D-78EA-531D-F514-F4716BEAD197}"/>
               </a:ext>
             </a:extLst>
           </p:cNvPr>
@@ -3285,7 +3285,7 @@
             </a:lvl1pPr>
           </a:lstStyle>
           <a:p>
-            <a:fld id="{10F5DA9A-F8F8-4C09-9300-0EC11599EF1C}" type="slidenum">
+            <a:fld id="{B68EBE78-F976-4D8A-91AA-80465F9E6AE4}" type="slidenum">
               <a:rPr kumimoji="1" lang="ja-JP" altLang="en-US" smtClean="0"/>
               <a:t>‹#›</a:t>
             </a:fld>
@@ -3296,7 +3296,7 @@
     </p:spTree>
     <p:extLst>
       <p:ext uri="{BB962C8B-B14F-4D97-AF65-F5344CB8AC3E}">
-        <p14:creationId xmlns:p14="http://schemas.microsoft.com/office/powerpoint/2010/main" val="2905468084"/>
+        <p14:creationId xmlns:p14="http://schemas.microsoft.com/office/powerpoint/2010/main" val="1033222858"/>
       </p:ext>
     </p:extLst>
   </p:cSld>
@@ -3619,7 +3619,7 @@
           <p:cNvPr id="2" name="テキスト ボックス 1">
             <a:extLst>
               <a:ext uri="{FF2B5EF4-FFF2-40B4-BE49-F238E27FC236}">
-                <a16:creationId xmlns:a16="http://schemas.microsoft.com/office/drawing/2014/main" id="{2C3501E5-AFE0-10F3-1DB9-67B77056F5F6}"/>
+                <a16:creationId xmlns:a16="http://schemas.microsoft.com/office/drawing/2014/main" id="{599B8E35-43A6-0B72-3272-95E491B5DD80}"/>
               </a:ext>
             </a:extLst>
           </p:cNvPr>
@@ -3665,7 +3665,7 @@
           <p:cNvPr id="3" name="テキスト ボックス 2">
             <a:extLst>
               <a:ext uri="{FF2B5EF4-FFF2-40B4-BE49-F238E27FC236}">
-                <a16:creationId xmlns:a16="http://schemas.microsoft.com/office/drawing/2014/main" id="{1579398A-C5BC-2005-A96F-68CF6D9ED5F8}"/>
+                <a16:creationId xmlns:a16="http://schemas.microsoft.com/office/drawing/2014/main" id="{00C709A5-D6D7-FCC4-E1BF-2253854C6AD2}"/>
               </a:ext>
             </a:extLst>
           </p:cNvPr>
@@ -3714,7 +3714,7 @@
           <p:cNvPr id="4" name="テキスト ボックス 3">
             <a:extLst>
               <a:ext uri="{FF2B5EF4-FFF2-40B4-BE49-F238E27FC236}">
-                <a16:creationId xmlns:a16="http://schemas.microsoft.com/office/drawing/2014/main" id="{99D3BA78-ABE7-E9E5-40D6-F9D966C519AB}"/>
+                <a16:creationId xmlns:a16="http://schemas.microsoft.com/office/drawing/2014/main" id="{854769AC-4550-5C97-81CF-B3E6AE812E67}"/>
               </a:ext>
             </a:extLst>
           </p:cNvPr>
@@ -3754,7 +3754,7 @@
           <p:cNvPr id="5" name="テキスト ボックス 4">
             <a:extLst>
               <a:ext uri="{FF2B5EF4-FFF2-40B4-BE49-F238E27FC236}">
-                <a16:creationId xmlns:a16="http://schemas.microsoft.com/office/drawing/2014/main" id="{B924FFC6-5A50-7202-58FD-C4C64F36F186}"/>
+                <a16:creationId xmlns:a16="http://schemas.microsoft.com/office/drawing/2014/main" id="{0E2B0B75-F0B0-B77E-DE2D-D20F49A9C0DA}"/>
               </a:ext>
             </a:extLst>
           </p:cNvPr>
@@ -3801,7 +3801,7 @@
             <a:hlinkClick r:id="" action="ppaction://media"/>
             <a:extLst>
               <a:ext uri="{FF2B5EF4-FFF2-40B4-BE49-F238E27FC236}">
-                <a16:creationId xmlns:a16="http://schemas.microsoft.com/office/drawing/2014/main" id="{C98B648E-C32A-E951-3C78-C98C36EE4B28}"/>
+                <a16:creationId xmlns:a16="http://schemas.microsoft.com/office/drawing/2014/main" id="{47EFAFF6-2123-FCE9-3201-E867E1B71B6E}"/>
               </a:ext>
             </a:extLst>
           </p:cNvPr>
@@ -3836,7 +3836,7 @@
     </p:spTree>
     <p:extLst>
       <p:ext uri="{BB962C8B-B14F-4D97-AF65-F5344CB8AC3E}">
-        <p14:creationId xmlns:p14="http://schemas.microsoft.com/office/powerpoint/2010/main" val="2397645282"/>
+        <p14:creationId xmlns:p14="http://schemas.microsoft.com/office/powerpoint/2010/main" val="1598977166"/>
       </p:ext>
     </p:extLst>
   </p:cSld>
@@ -3960,7 +3960,7 @@
           <p:cNvPr id="2" name="テキスト ボックス 1">
             <a:extLst>
               <a:ext uri="{FF2B5EF4-FFF2-40B4-BE49-F238E27FC236}">
-                <a16:creationId xmlns:a16="http://schemas.microsoft.com/office/drawing/2014/main" id="{5BD96682-25B7-496A-55AF-53311AF442DB}"/>
+                <a16:creationId xmlns:a16="http://schemas.microsoft.com/office/drawing/2014/main" id="{3EC65780-625B-79C8-64CF-0DE1C6AFB71A}"/>
               </a:ext>
             </a:extLst>
           </p:cNvPr>
@@ -4006,7 +4006,7 @@
           <p:cNvPr id="3" name="テキスト ボックス 2">
             <a:extLst>
               <a:ext uri="{FF2B5EF4-FFF2-40B4-BE49-F238E27FC236}">
-                <a16:creationId xmlns:a16="http://schemas.microsoft.com/office/drawing/2014/main" id="{D749B9A0-0069-DCEA-AFF5-CF2E9AE0CFDC}"/>
+                <a16:creationId xmlns:a16="http://schemas.microsoft.com/office/drawing/2014/main" id="{7DEBB5C6-B10F-DE89-8F0A-EC8849CD5E5A}"/>
               </a:ext>
             </a:extLst>
           </p:cNvPr>
@@ -4046,7 +4046,7 @@
           <p:cNvPr id="4" name="テキスト ボックス 3">
             <a:extLst>
               <a:ext uri="{FF2B5EF4-FFF2-40B4-BE49-F238E27FC236}">
-                <a16:creationId xmlns:a16="http://schemas.microsoft.com/office/drawing/2014/main" id="{9034C77D-3676-AB0D-F3DB-E456BD8ADC86}"/>
+                <a16:creationId xmlns:a16="http://schemas.microsoft.com/office/drawing/2014/main" id="{73B59331-065B-AA45-8841-4CFBB6447F01}"/>
               </a:ext>
             </a:extLst>
           </p:cNvPr>
@@ -4113,7 +4113,7 @@
           <p:cNvPr id="5" name="テキスト ボックス 4">
             <a:extLst>
               <a:ext uri="{FF2B5EF4-FFF2-40B4-BE49-F238E27FC236}">
-                <a16:creationId xmlns:a16="http://schemas.microsoft.com/office/drawing/2014/main" id="{BFA3AA35-A6DB-5E14-AEB9-289B3C98D2DE}"/>
+                <a16:creationId xmlns:a16="http://schemas.microsoft.com/office/drawing/2014/main" id="{E52BE085-F309-7D63-2F16-BE463B168EF6}"/>
               </a:ext>
             </a:extLst>
           </p:cNvPr>
@@ -4160,7 +4160,7 @@
             <a:hlinkClick r:id="" action="ppaction://media"/>
             <a:extLst>
               <a:ext uri="{FF2B5EF4-FFF2-40B4-BE49-F238E27FC236}">
-                <a16:creationId xmlns:a16="http://schemas.microsoft.com/office/drawing/2014/main" id="{5756C7AD-0D09-6EF4-E4E0-89320F80D283}"/>
+                <a16:creationId xmlns:a16="http://schemas.microsoft.com/office/drawing/2014/main" id="{D6E960CA-343F-156C-71EF-F8432E76F1C0}"/>
               </a:ext>
             </a:extLst>
           </p:cNvPr>
@@ -4195,7 +4195,7 @@
     </p:spTree>
     <p:extLst>
       <p:ext uri="{BB962C8B-B14F-4D97-AF65-F5344CB8AC3E}">
-        <p14:creationId xmlns:p14="http://schemas.microsoft.com/office/powerpoint/2010/main" val="2900065996"/>
+        <p14:creationId xmlns:p14="http://schemas.microsoft.com/office/powerpoint/2010/main" val="229783837"/>
       </p:ext>
     </p:extLst>
   </p:cSld>
@@ -4319,7 +4319,7 @@
           <p:cNvPr id="2" name="テキスト ボックス 1">
             <a:extLst>
               <a:ext uri="{FF2B5EF4-FFF2-40B4-BE49-F238E27FC236}">
-                <a16:creationId xmlns:a16="http://schemas.microsoft.com/office/drawing/2014/main" id="{7DFB6F93-309D-1FB0-BBCC-2E0F94381736}"/>
+                <a16:creationId xmlns:a16="http://schemas.microsoft.com/office/drawing/2014/main" id="{A82B052B-ABE8-7B4E-A576-673A7FA1AE40}"/>
               </a:ext>
             </a:extLst>
           </p:cNvPr>
@@ -4365,7 +4365,7 @@
           <p:cNvPr id="3" name="テキスト ボックス 2">
             <a:extLst>
               <a:ext uri="{FF2B5EF4-FFF2-40B4-BE49-F238E27FC236}">
-                <a16:creationId xmlns:a16="http://schemas.microsoft.com/office/drawing/2014/main" id="{1FEF68F1-AD48-EBCA-824E-F30E6F032471}"/>
+                <a16:creationId xmlns:a16="http://schemas.microsoft.com/office/drawing/2014/main" id="{D472A04F-5AEB-E816-2F45-4B8D0CA84370}"/>
               </a:ext>
             </a:extLst>
           </p:cNvPr>
@@ -4405,7 +4405,7 @@
           <p:cNvPr id="4" name="テキスト ボックス 3">
             <a:extLst>
               <a:ext uri="{FF2B5EF4-FFF2-40B4-BE49-F238E27FC236}">
-                <a16:creationId xmlns:a16="http://schemas.microsoft.com/office/drawing/2014/main" id="{40CC8ADC-D428-5903-098F-86293F6E2E6C}"/>
+                <a16:creationId xmlns:a16="http://schemas.microsoft.com/office/drawing/2014/main" id="{307A8F4C-3211-00BA-6418-19A88C715FA0}"/>
               </a:ext>
             </a:extLst>
           </p:cNvPr>
@@ -4464,7 +4464,7 @@
           <p:cNvPr id="5" name="テキスト ボックス 4">
             <a:extLst>
               <a:ext uri="{FF2B5EF4-FFF2-40B4-BE49-F238E27FC236}">
-                <a16:creationId xmlns:a16="http://schemas.microsoft.com/office/drawing/2014/main" id="{48BC64CA-B091-DA0F-4A03-639C9CFB1C04}"/>
+                <a16:creationId xmlns:a16="http://schemas.microsoft.com/office/drawing/2014/main" id="{A1EC2C56-FE9E-CAC3-B651-F8A1BF00D179}"/>
               </a:ext>
             </a:extLst>
           </p:cNvPr>
@@ -4511,7 +4511,7 @@
             <a:hlinkClick r:id="" action="ppaction://media"/>
             <a:extLst>
               <a:ext uri="{FF2B5EF4-FFF2-40B4-BE49-F238E27FC236}">
-                <a16:creationId xmlns:a16="http://schemas.microsoft.com/office/drawing/2014/main" id="{03738E7F-75BC-391D-B03A-7EA256FB37D2}"/>
+                <a16:creationId xmlns:a16="http://schemas.microsoft.com/office/drawing/2014/main" id="{87DA8F8E-C1B8-6D1E-7BFE-4BBE512BEA95}"/>
               </a:ext>
             </a:extLst>
           </p:cNvPr>
@@ -4546,7 +4546,7 @@
     </p:spTree>
     <p:extLst>
       <p:ext uri="{BB962C8B-B14F-4D97-AF65-F5344CB8AC3E}">
-        <p14:creationId xmlns:p14="http://schemas.microsoft.com/office/powerpoint/2010/main" val="1917435779"/>
+        <p14:creationId xmlns:p14="http://schemas.microsoft.com/office/powerpoint/2010/main" val="215458592"/>
       </p:ext>
     </p:extLst>
   </p:cSld>
@@ -4670,7 +4670,7 @@
           <p:cNvPr id="2" name="テキスト ボックス 1">
             <a:extLst>
               <a:ext uri="{FF2B5EF4-FFF2-40B4-BE49-F238E27FC236}">
-                <a16:creationId xmlns:a16="http://schemas.microsoft.com/office/drawing/2014/main" id="{A4257E42-07A4-8800-C553-3CB5E8CCB77C}"/>
+                <a16:creationId xmlns:a16="http://schemas.microsoft.com/office/drawing/2014/main" id="{C3FBF75C-AC25-8515-004A-C35BB3E78310}"/>
               </a:ext>
             </a:extLst>
           </p:cNvPr>
@@ -4716,7 +4716,7 @@
           <p:cNvPr id="3" name="テキスト ボックス 2">
             <a:extLst>
               <a:ext uri="{FF2B5EF4-FFF2-40B4-BE49-F238E27FC236}">
-                <a16:creationId xmlns:a16="http://schemas.microsoft.com/office/drawing/2014/main" id="{DADAE75A-FB57-6EB4-8628-0436A32694D9}"/>
+                <a16:creationId xmlns:a16="http://schemas.microsoft.com/office/drawing/2014/main" id="{68E0098F-5F10-A97D-7302-164BBBD680F0}"/>
               </a:ext>
             </a:extLst>
           </p:cNvPr>
@@ -4756,7 +4756,7 @@
           <p:cNvPr id="4" name="テキスト ボックス 3">
             <a:extLst>
               <a:ext uri="{FF2B5EF4-FFF2-40B4-BE49-F238E27FC236}">
-                <a16:creationId xmlns:a16="http://schemas.microsoft.com/office/drawing/2014/main" id="{29C6B364-2D14-EB29-92AE-A4EBBB9A0F12}"/>
+                <a16:creationId xmlns:a16="http://schemas.microsoft.com/office/drawing/2014/main" id="{1364D545-1CD1-CC9A-90A4-857389123DE6}"/>
               </a:ext>
             </a:extLst>
           </p:cNvPr>
@@ -4866,7 +4866,7 @@
           <p:cNvPr id="5" name="テキスト ボックス 4">
             <a:extLst>
               <a:ext uri="{FF2B5EF4-FFF2-40B4-BE49-F238E27FC236}">
-                <a16:creationId xmlns:a16="http://schemas.microsoft.com/office/drawing/2014/main" id="{9E9321CB-775A-8620-84F9-F11E8348D078}"/>
+                <a16:creationId xmlns:a16="http://schemas.microsoft.com/office/drawing/2014/main" id="{D7792D62-9285-1A2E-18BE-270E921823F7}"/>
               </a:ext>
             </a:extLst>
           </p:cNvPr>
@@ -4913,7 +4913,7 @@
             <a:hlinkClick r:id="" action="ppaction://media"/>
             <a:extLst>
               <a:ext uri="{FF2B5EF4-FFF2-40B4-BE49-F238E27FC236}">
-                <a16:creationId xmlns:a16="http://schemas.microsoft.com/office/drawing/2014/main" id="{F9A041EC-689D-8C15-83CE-299863CF58C4}"/>
+                <a16:creationId xmlns:a16="http://schemas.microsoft.com/office/drawing/2014/main" id="{C301AB66-5B78-B080-34A4-A46769D6A48E}"/>
               </a:ext>
             </a:extLst>
           </p:cNvPr>
@@ -4948,7 +4948,7 @@
     </p:spTree>
     <p:extLst>
       <p:ext uri="{BB962C8B-B14F-4D97-AF65-F5344CB8AC3E}">
-        <p14:creationId xmlns:p14="http://schemas.microsoft.com/office/powerpoint/2010/main" val="3701508780"/>
+        <p14:creationId xmlns:p14="http://schemas.microsoft.com/office/powerpoint/2010/main" val="1903328264"/>
       </p:ext>
     </p:extLst>
   </p:cSld>
@@ -5072,7 +5072,7 @@
           <p:cNvPr id="2" name="テキスト ボックス 1">
             <a:extLst>
               <a:ext uri="{FF2B5EF4-FFF2-40B4-BE49-F238E27FC236}">
-                <a16:creationId xmlns:a16="http://schemas.microsoft.com/office/drawing/2014/main" id="{7A399D0E-CA43-5112-8C1F-AC8CC6110FAD}"/>
+                <a16:creationId xmlns:a16="http://schemas.microsoft.com/office/drawing/2014/main" id="{10B7999A-10AD-1F38-A8EA-CD14B5958322}"/>
               </a:ext>
             </a:extLst>
           </p:cNvPr>
@@ -5118,7 +5118,7 @@
           <p:cNvPr id="3" name="テキスト ボックス 2">
             <a:extLst>
               <a:ext uri="{FF2B5EF4-FFF2-40B4-BE49-F238E27FC236}">
-                <a16:creationId xmlns:a16="http://schemas.microsoft.com/office/drawing/2014/main" id="{F869164A-D8F5-729E-FD45-F13F8630203D}"/>
+                <a16:creationId xmlns:a16="http://schemas.microsoft.com/office/drawing/2014/main" id="{DFA16F05-3C51-9724-8698-E0E724F1AB39}"/>
               </a:ext>
             </a:extLst>
           </p:cNvPr>
@@ -5158,7 +5158,7 @@
           <p:cNvPr id="4" name="テキスト ボックス 3">
             <a:extLst>
               <a:ext uri="{FF2B5EF4-FFF2-40B4-BE49-F238E27FC236}">
-                <a16:creationId xmlns:a16="http://schemas.microsoft.com/office/drawing/2014/main" id="{3C7FB6C9-F910-64FF-8C66-48A8489966E0}"/>
+                <a16:creationId xmlns:a16="http://schemas.microsoft.com/office/drawing/2014/main" id="{2017548E-8534-461A-CA70-BC37E57030D4}"/>
               </a:ext>
             </a:extLst>
           </p:cNvPr>
@@ -5182,20 +5182,14 @@
           <a:lstStyle/>
           <a:p>
             <a:r>
-              <a:rPr kumimoji="1" lang="en-US" altLang="ja-JP" sz="2000">
+              <a:rPr kumimoji="1" lang="ja-JP" altLang="en-US" sz="2000">
                 <a:solidFill>
                   <a:srgbClr val="333333"/>
                 </a:solidFill>
                 <a:latin typeface="Arial" panose="020B0604020202020204" pitchFamily="34" charset="0"/>
               </a:rPr>
-              <a:t>Initial commit: MVP API, event scraper, and site design doc.</a:t>
-            </a:r>
-            <a:endParaRPr kumimoji="1" lang="ja-JP" altLang="en-US" sz="2000">
-              <a:solidFill>
-                <a:srgbClr val="333333"/>
-              </a:solidFill>
-              <a:latin typeface="Arial" panose="020B0604020202020204" pitchFamily="34" charset="0"/>
-            </a:endParaRPr>
+              <a:t>直近のコミットでは、プロジェクトの初期構成と開発基盤が整備されました。</a:t>
+            </a:r>
           </a:p>
         </p:txBody>
       </p:sp>
@@ -5204,7 +5198,7 @@
           <p:cNvPr id="5" name="テキスト ボックス 4">
             <a:extLst>
               <a:ext uri="{FF2B5EF4-FFF2-40B4-BE49-F238E27FC236}">
-                <a16:creationId xmlns:a16="http://schemas.microsoft.com/office/drawing/2014/main" id="{FFD9B844-C2DC-2EA5-3C11-0FC56D8F462F}"/>
+                <a16:creationId xmlns:a16="http://schemas.microsoft.com/office/drawing/2014/main" id="{61F2466E-F62B-EBBD-27A0-6FC023DC1C10}"/>
               </a:ext>
             </a:extLst>
           </p:cNvPr>
@@ -5251,7 +5245,7 @@
             <a:hlinkClick r:id="" action="ppaction://media"/>
             <a:extLst>
               <a:ext uri="{FF2B5EF4-FFF2-40B4-BE49-F238E27FC236}">
-                <a16:creationId xmlns:a16="http://schemas.microsoft.com/office/drawing/2014/main" id="{2628C926-2C2A-8719-4347-5A5D311F2783}"/>
+                <a16:creationId xmlns:a16="http://schemas.microsoft.com/office/drawing/2014/main" id="{7156DE10-A791-46C5-1221-F39630F31BD3}"/>
               </a:ext>
             </a:extLst>
           </p:cNvPr>
@@ -5286,7 +5280,7 @@
     </p:spTree>
     <p:extLst>
       <p:ext uri="{BB962C8B-B14F-4D97-AF65-F5344CB8AC3E}">
-        <p14:creationId xmlns:p14="http://schemas.microsoft.com/office/powerpoint/2010/main" val="3347530729"/>
+        <p14:creationId xmlns:p14="http://schemas.microsoft.com/office/powerpoint/2010/main" val="495269570"/>
       </p:ext>
     </p:extLst>
   </p:cSld>
@@ -5295,10 +5289,10 @@
   </p:clrMapOvr>
   <mc:AlternateContent xmlns:mc="http://schemas.openxmlformats.org/markup-compatibility/2006">
     <mc:Choice xmlns:p14="http://schemas.microsoft.com/office/powerpoint/2010/main" Requires="p14">
-      <p:transition spd="slow" p14:dur="2000" advTm="11000"/>
+      <p:transition spd="slow" p14:dur="2000" advTm="7000"/>
     </mc:Choice>
     <mc:Fallback>
-      <p:transition spd="slow" advTm="11000"/>
+      <p:transition spd="slow" advTm="7000"/>
     </mc:Fallback>
   </mc:AlternateContent>
   <p:timing>
@@ -5329,7 +5323,7 @@
                                   <p:childTnLst>
                                     <p:cmd type="call" cmd="playFrom(0.0)">
                                       <p:cBhvr>
-                                        <p:cTn id="6" dur="10470" fill="hold"/>
+                                        <p:cTn id="6" dur="6126" fill="hold"/>
                                         <p:tgtEl>
                                           <p:spTgt spid="6"/>
                                         </p:tgtEl>
@@ -5410,7 +5404,7 @@
           <p:cNvPr id="2" name="テキスト ボックス 1">
             <a:extLst>
               <a:ext uri="{FF2B5EF4-FFF2-40B4-BE49-F238E27FC236}">
-                <a16:creationId xmlns:a16="http://schemas.microsoft.com/office/drawing/2014/main" id="{F8114B3A-751A-575E-BF85-6A37204369AC}"/>
+                <a16:creationId xmlns:a16="http://schemas.microsoft.com/office/drawing/2014/main" id="{DD2EA31C-28E1-1CA8-0EC3-ABCD14E75195}"/>
               </a:ext>
             </a:extLst>
           </p:cNvPr>
@@ -5456,7 +5450,7 @@
           <p:cNvPr id="3" name="テキスト ボックス 2">
             <a:extLst>
               <a:ext uri="{FF2B5EF4-FFF2-40B4-BE49-F238E27FC236}">
-                <a16:creationId xmlns:a16="http://schemas.microsoft.com/office/drawing/2014/main" id="{E4E3C663-9EE5-F2EC-EBF8-A4E34D47947A}"/>
+                <a16:creationId xmlns:a16="http://schemas.microsoft.com/office/drawing/2014/main" id="{C8782766-78E5-A97F-D563-3F4356AED267}"/>
               </a:ext>
             </a:extLst>
           </p:cNvPr>
@@ -5496,7 +5490,7 @@
           <p:cNvPr id="4" name="テキスト ボックス 3">
             <a:extLst>
               <a:ext uri="{FF2B5EF4-FFF2-40B4-BE49-F238E27FC236}">
-                <a16:creationId xmlns:a16="http://schemas.microsoft.com/office/drawing/2014/main" id="{720457A2-DE59-9545-32B5-8AE498A486CA}"/>
+                <a16:creationId xmlns:a16="http://schemas.microsoft.com/office/drawing/2014/main" id="{09690E08-FAAE-4B18-63A0-47F3C44AE345}"/>
               </a:ext>
             </a:extLst>
           </p:cNvPr>
@@ -5561,7 +5555,7 @@
           <p:cNvPr id="5" name="テキスト ボックス 4">
             <a:extLst>
               <a:ext uri="{FF2B5EF4-FFF2-40B4-BE49-F238E27FC236}">
-                <a16:creationId xmlns:a16="http://schemas.microsoft.com/office/drawing/2014/main" id="{AD245ED2-E987-2E58-DC8A-73F479344033}"/>
+                <a16:creationId xmlns:a16="http://schemas.microsoft.com/office/drawing/2014/main" id="{41683C76-754D-D10F-ACE2-B10326286975}"/>
               </a:ext>
             </a:extLst>
           </p:cNvPr>
@@ -5608,7 +5602,7 @@
             <a:hlinkClick r:id="" action="ppaction://media"/>
             <a:extLst>
               <a:ext uri="{FF2B5EF4-FFF2-40B4-BE49-F238E27FC236}">
-                <a16:creationId xmlns:a16="http://schemas.microsoft.com/office/drawing/2014/main" id="{D5E37CD2-F1C8-B6A6-6262-946A6F2C6A29}"/>
+                <a16:creationId xmlns:a16="http://schemas.microsoft.com/office/drawing/2014/main" id="{B480574E-D0D6-3D98-D4FC-6E636EC54F8A}"/>
               </a:ext>
             </a:extLst>
           </p:cNvPr>
@@ -5643,7 +5637,7 @@
     </p:spTree>
     <p:extLst>
       <p:ext uri="{BB962C8B-B14F-4D97-AF65-F5344CB8AC3E}">
-        <p14:creationId xmlns:p14="http://schemas.microsoft.com/office/powerpoint/2010/main" val="1572039020"/>
+        <p14:creationId xmlns:p14="http://schemas.microsoft.com/office/powerpoint/2010/main" val="2451394418"/>
       </p:ext>
     </p:extLst>
   </p:cSld>
